--- a/modulo-02/02.02 - Usando Tipos de Dados e Conversões Corretamente/02.02_Tipos_de_dados_e_conversões_corretas.pptx
+++ b/modulo-02/02.02 - Usando Tipos de Dados e Conversões Corretamente/02.02_Tipos_de_dados_e_conversões_corretas.pptx
@@ -1728,7 +1728,7 @@
                   <a:srgbClr val="8FA3C7"/>
                 </a:solidFill>
               </a:rPr>
-              <a:t>ABAP Moderno · Módulo 04 — Programação ABAP Intermediária  ·  Aula 2 de 9 — Tipos e conversões</a:t>
+              <a:t>ABAP Moderno · Módulo 02 — Programação ABAP Intermediária  ·  Aula 2 de 9 — Tipos e conversões</a:t>
             </a:r>
             <a:endParaRPr lang="en-US" sz="900" dirty="0"/>
           </a:p>
@@ -1874,7 +1874,7 @@
                   <a:srgbClr val="556B82"/>
                 </a:solidFill>
               </a:rPr>
-              <a:t>ABAP Moderno · Módulo 04 — Programação ABAP Intermediária  ·  Aula 2 de 9 — Tipos e conversões</a:t>
+              <a:t>ABAP Moderno · Módulo 02 — Programação ABAP Intermediária  ·  Aula 2 de 9 — Tipos e conversões</a:t>
             </a:r>
             <a:endParaRPr lang="en-US" sz="900" dirty="0"/>
           </a:p>
@@ -2305,7 +2305,7 @@
                   <a:srgbClr val="89D1FF"/>
                 </a:solidFill>
               </a:rPr>
-              <a:t>MÓDULO 04 · AULA 02 DE 09</a:t>
+              <a:t>MÓDULO 02 · AULA 02 DE 09</a:t>
             </a:r>
             <a:endParaRPr lang="en-US" sz="1400" dirty="0"/>
           </a:p>
@@ -2691,7 +2691,7 @@
                   <a:srgbClr val="8FA3C7"/>
                 </a:solidFill>
               </a:rPr>
-              <a:t>ABAP Moderno · Módulo 04 — Programação ABAP Intermediária · Design System SAP Horizon</a:t>
+              <a:t>ABAP Moderno · Módulo 02 — Programação ABAP Intermediária · Design System SAP Horizon</a:t>
             </a:r>
             <a:endParaRPr lang="en-US" sz="1100" dirty="0"/>
           </a:p>
@@ -2941,7 +2941,7 @@
                   <a:srgbClr val="FFFFFF"/>
                 </a:solidFill>
               </a:rPr>
-              <a:t>zcl_04_conv.clas.abap</a:t>
+              <a:t>zcl_02_conv.clas.abap</a:t>
             </a:r>
             <a:endParaRPr lang="en-US" sz="950" dirty="0"/>
           </a:p>
@@ -2977,7 +2977,7 @@
                   <a:srgbClr val="9DA5B4"/>
                 </a:solidFill>
               </a:rPr>
-              <a:t>ZS4D401_## › ZCL_04_CONV › main</a:t>
+              <a:t>ZS4D401_## › ZCL_02_CONV › main</a:t>
             </a:r>
             <a:endParaRPr lang="en-US" sz="850" dirty="0"/>
           </a:p>
@@ -4078,7 +4078,7 @@
                 <a:ea typeface="Courier New" pitchFamily="34" charset="-122"/>
                 <a:cs typeface="Courier New" pitchFamily="34" charset="-120"/>
               </a:rPr>
-              <a:t>carrier_id</a:t>
+              <a:t>sku</a:t>
             </a:r>
             <a:r>
               <a:rPr lang="en-US" sz="1050" dirty="0">
@@ -4177,7 +4177,7 @@
                 <a:ea typeface="Courier New" pitchFamily="34" charset="-122"/>
                 <a:cs typeface="Courier New" pitchFamily="34" charset="-120"/>
               </a:rPr>
-              <a:t>i_carrier_id</a:t>
+              <a:t>sku_da_planilha</a:t>
             </a:r>
             <a:r>
               <a:rPr lang="en-US" sz="1050" dirty="0">
@@ -4305,7 +4305,7 @@
                 <a:ea typeface="Courier New" pitchFamily="34" charset="-122"/>
                 <a:cs typeface="Courier New" pitchFamily="34" charset="-120"/>
               </a:rPr>
-              <a:t>" o tamanho dos tipos não bate: corrija a declaração</a:t>
+              <a:t>" maior que os 21 caracteres de zta_pc_item-sku</a:t>
             </a:r>
             <a:endParaRPr lang="en-US" sz="1050" dirty="0"/>
           </a:p>
@@ -4703,64 +4703,7 @@
                   <a:srgbClr val="556B82"/>
                 </a:solidFill>
               </a:rPr>
-              <a:t>No exercício oficial, </a:t>
-            </a:r>
-            <a:r>
-              <a:rPr lang="en-US" sz="1050" dirty="0">
-                <a:solidFill>
-                  <a:srgbClr val="0064D9"/>
-                </a:solidFill>
-                <a:latin typeface="Courier New" pitchFamily="34" charset="0"/>
-                <a:ea typeface="Courier New" pitchFamily="34" charset="-122"/>
-                <a:cs typeface="Courier New" pitchFamily="34" charset="-120"/>
-              </a:rPr>
-              <a:t>EXACT</a:t>
-            </a:r>
-            <a:r>
-              <a:rPr lang="en-US" sz="1050" dirty="0">
-                <a:solidFill>
-                  <a:srgbClr val="556B82"/>
-                </a:solidFill>
-              </a:rPr>
-              <a:t> revela IDs com tipos trocados (</a:t>
-            </a:r>
-            <a:r>
-              <a:rPr lang="en-US" sz="1050" dirty="0">
-                <a:solidFill>
-                  <a:srgbClr val="0064D9"/>
-                </a:solidFill>
-                <a:latin typeface="Courier New" pitchFamily="34" charset="0"/>
-                <a:ea typeface="Courier New" pitchFamily="34" charset="-122"/>
-                <a:cs typeface="Courier New" pitchFamily="34" charset="-120"/>
-              </a:rPr>
-              <a:t>carrier_id</a:t>
-            </a:r>
-            <a:r>
-              <a:rPr lang="en-US" sz="1050" dirty="0">
-                <a:solidFill>
-                  <a:srgbClr val="556B82"/>
-                </a:solidFill>
-              </a:rPr>
-              <a:t> x </a:t>
-            </a:r>
-            <a:r>
-              <a:rPr lang="en-US" sz="1050" dirty="0">
-                <a:solidFill>
-                  <a:srgbClr val="0064D9"/>
-                </a:solidFill>
-                <a:latin typeface="Courier New" pitchFamily="34" charset="0"/>
-                <a:ea typeface="Courier New" pitchFamily="34" charset="-122"/>
-                <a:cs typeface="Courier New" pitchFamily="34" charset="-120"/>
-              </a:rPr>
-              <a:t>connection_id</a:t>
-            </a:r>
-            <a:r>
-              <a:rPr lang="en-US" sz="1050" dirty="0">
-                <a:solidFill>
-                  <a:srgbClr val="556B82"/>
-                </a:solidFill>
-              </a:rPr>
-              <a:t>).</a:t>
+              <a:t>Um SKU de planilha maior que o campo levanta exceção, em vez de ser cortado em silêncio.</a:t>
             </a:r>
             <a:endParaRPr lang="en-US" sz="1400" dirty="0"/>
           </a:p>
@@ -4997,7 +4940,7 @@
                   <a:srgbClr val="89D1FF"/>
                 </a:solidFill>
               </a:rPr>
-              <a:t>AULA 04.02 · SEÇÃO 4</a:t>
+              <a:t>AULA 02.02 · SEÇÃO 4</a:t>
             </a:r>
             <a:endParaRPr lang="en-US" sz="1300" dirty="0"/>
           </a:p>
@@ -5616,7 +5559,7 @@
                   <a:srgbClr val="FFFFFF"/>
                 </a:solidFill>
               </a:rPr>
-              <a:t>zcl_04_time.clas.abap</a:t>
+              <a:t>zcl_02_time.clas.abap</a:t>
             </a:r>
             <a:endParaRPr lang="en-US" sz="950" dirty="0"/>
           </a:p>
@@ -5652,7 +5595,7 @@
                   <a:srgbClr val="9DA5B4"/>
                 </a:solidFill>
               </a:rPr>
-              <a:t>ZS4D401_## › ZCL_04_TIME › main</a:t>
+              <a:t>ZS4D401_## › ZCL_02_TIME › main</a:t>
             </a:r>
             <a:endParaRPr lang="en-US" sz="850" dirty="0"/>
           </a:p>
@@ -8341,7 +8284,7 @@
                   <a:srgbClr val="0064D9"/>
                 </a:solidFill>
               </a:rPr>
-              <a:t>Exercício oficial  </a:t>
+              <a:t>No projeto  </a:t>
             </a:r>
             <a:r>
               <a:rPr lang="en-US" sz="1200" dirty="0">
@@ -8349,7 +8292,45 @@
                   <a:srgbClr val="1D2D3E"/>
                 </a:solidFill>
               </a:rPr>
-              <a:t>a duração de um voo entre fusos diferentes só fica certa convertendo partida e chegada para UTC antes de subtrair.</a:t>
+              <a:t>o pagamento simulado compara a validade MM/AA com a data do sistema por offsets: </a:t>
+            </a:r>
+            <a:r>
+              <a:rPr lang="en-US" sz="1200" dirty="0">
+                <a:solidFill>
+                  <a:srgbClr val="0064D9"/>
+                </a:solidFill>
+                <a:latin typeface="Courier New" pitchFamily="34" charset="0"/>
+                <a:ea typeface="Courier New" pitchFamily="34" charset="-122"/>
+                <a:cs typeface="Courier New" pitchFamily="34" charset="-120"/>
+              </a:rPr>
+              <a:t>CONV i( lv_validade(2) )</a:t>
+            </a:r>
+            <a:r>
+              <a:rPr lang="en-US" sz="1200" dirty="0">
+                <a:solidFill>
+                  <a:srgbClr val="1D2D3E"/>
+                </a:solidFill>
+              </a:rPr>
+              <a:t> é o mês e </a:t>
+            </a:r>
+            <a:r>
+              <a:rPr lang="en-US" sz="1200" dirty="0">
+                <a:solidFill>
+                  <a:srgbClr val="0064D9"/>
+                </a:solidFill>
+                <a:latin typeface="Courier New" pitchFamily="34" charset="0"/>
+                <a:ea typeface="Courier New" pitchFamily="34" charset="-122"/>
+                <a:cs typeface="Courier New" pitchFamily="34" charset="-120"/>
+              </a:rPr>
+              <a:t>CONV i( lv_hoje(4) )</a:t>
+            </a:r>
+            <a:r>
+              <a:rPr lang="en-US" sz="1200" dirty="0">
+                <a:solidFill>
+                  <a:srgbClr val="1D2D3E"/>
+                </a:solidFill>
+              </a:rPr>
+              <a:t>, o ano.</a:t>
             </a:r>
             <a:endParaRPr lang="en-US" sz="1400" dirty="0"/>
           </a:p>
@@ -8515,7 +8496,7 @@
                   <a:srgbClr val="FFFFFF"/>
                 </a:solidFill>
               </a:rPr>
-              <a:t>O que aprendemos na aula 04.02</a:t>
+              <a:t>O que aprendemos na aula 02.02</a:t>
             </a:r>
             <a:endParaRPr lang="en-US" sz="3200" dirty="0"/>
           </a:p>
@@ -9175,7 +9156,7 @@
                   <a:srgbClr val="89D1FF"/>
                 </a:solidFill>
               </a:rPr>
-              <a:t>Próxima aula · 04.03  </a:t>
+              <a:t>Próxima aula · 02.03  </a:t>
             </a:r>
             <a:r>
               <a:rPr lang="en-US" sz="1500" dirty="0">
@@ -9301,7 +9282,7 @@
         </p:blipFill>
         <p:spPr>
           <a:xfrm>
-            <a:off x="6355080" y="3886200"/>
+            <a:off x="822960" y="3886200"/>
             <a:ext cx="256032" cy="256032"/>
           </a:xfrm>
           <a:prstGeom prst="rect">
@@ -9325,7 +9306,7 @@
         </p:blipFill>
         <p:spPr>
           <a:xfrm>
-            <a:off x="822960" y="3886200"/>
+            <a:off x="6355080" y="3886200"/>
             <a:ext cx="256032" cy="256032"/>
           </a:xfrm>
           <a:prstGeom prst="rect">
@@ -9452,7 +9433,7 @@
                   <a:srgbClr val="1D2D3E"/>
                 </a:solidFill>
               </a:rPr>
-              <a:t>Módulo 04 em 9 aulas: ABAP intermediário</a:t>
+              <a:t>Módulo 02 em 9 aulas: ABAP intermediário</a:t>
             </a:r>
             <a:endParaRPr lang="en-US" sz="2800" dirty="0"/>
           </a:p>
@@ -11034,7 +11015,7 @@
                   <a:srgbClr val="1D2D3E"/>
                 </a:solidFill>
               </a:rPr>
-              <a:t>descobrimos por que o nome da companhia aparece cortado e o voo de carga sai com IDs trocados, e corrigimos com tipos e conversões seguras.</a:t>
+              <a:t>vemos onde conversões implícitas truncam ou arredondam sem avisar e como o projeto Pedidos de Compras converte com segurança a validade do cartão, preços e datas.</a:t>
             </a:r>
             <a:endParaRPr lang="en-US" sz="1400" dirty="0"/>
           </a:p>
@@ -11056,7 +11037,7 @@
         </p:blipFill>
         <p:spPr>
           <a:xfrm>
-            <a:off x="2072579" y="1847088"/>
+            <a:off x="6583497" y="1847088"/>
             <a:ext cx="347472" cy="347472"/>
           </a:xfrm>
           <a:prstGeom prst="rect">
@@ -11080,7 +11061,7 @@
         </p:blipFill>
         <p:spPr>
           <a:xfrm>
-            <a:off x="4328038" y="1847088"/>
+            <a:off x="2072579" y="1847088"/>
             <a:ext cx="347472" cy="347472"/>
           </a:xfrm>
           <a:prstGeom prst="rect">
@@ -11104,7 +11085,7 @@
         </p:blipFill>
         <p:spPr>
           <a:xfrm>
-            <a:off x="6583497" y="1847088"/>
+            <a:off x="4328038" y="1847088"/>
             <a:ext cx="347472" cy="347472"/>
           </a:xfrm>
           <a:prstGeom prst="rect">
@@ -11152,7 +11133,7 @@
         </p:blipFill>
         <p:spPr>
           <a:xfrm>
-            <a:off x="11094415" y="1847088"/>
+            <a:off x="2072579" y="3858768"/>
             <a:ext cx="347472" cy="347472"/>
           </a:xfrm>
           <a:prstGeom prst="rect">
@@ -11176,7 +11157,7 @@
         </p:blipFill>
         <p:spPr>
           <a:xfrm>
-            <a:off x="2072579" y="3858768"/>
+            <a:off x="11094415" y="1847088"/>
             <a:ext cx="347472" cy="347472"/>
           </a:xfrm>
           <a:prstGeom prst="rect">
@@ -11224,7 +11205,7 @@
         </p:blipFill>
         <p:spPr>
           <a:xfrm>
-            <a:off x="8838956" y="3858768"/>
+            <a:off x="6583497" y="3858768"/>
             <a:ext cx="347472" cy="347472"/>
           </a:xfrm>
           <a:prstGeom prst="rect">
@@ -11248,8 +11229,8 @@
         </p:blipFill>
         <p:spPr>
           <a:xfrm>
-            <a:off x="6583497" y="3858768"/>
-            <a:ext cx="347472" cy="347472"/>
+            <a:off x="749808" y="5751576"/>
+            <a:ext cx="310896" cy="310896"/>
           </a:xfrm>
           <a:prstGeom prst="rect">
             <a:avLst/>
@@ -11272,8 +11253,8 @@
         </p:blipFill>
         <p:spPr>
           <a:xfrm>
-            <a:off x="749808" y="5751576"/>
-            <a:ext cx="310896" cy="310896"/>
+            <a:off x="8838956" y="3858768"/>
+            <a:ext cx="347472" cy="347472"/>
           </a:xfrm>
           <a:prstGeom prst="rect">
             <a:avLst/>
@@ -12539,7 +12520,7 @@
                   <a:srgbClr val="89D1FF"/>
                 </a:solidFill>
               </a:rPr>
-              <a:t>AULA 04.02 · SEÇÃO 1</a:t>
+              <a:t>AULA 02.02 · SEÇÃO 1</a:t>
             </a:r>
             <a:endParaRPr lang="en-US" sz="1300" dirty="0"/>
           </a:p>
@@ -13863,7 +13844,7 @@
                   <a:srgbClr val="89D1FF"/>
                 </a:solidFill>
               </a:rPr>
-              <a:t>AULA 04.02 · SEÇÃO 2</a:t>
+              <a:t>AULA 02.02 · SEÇÃO 2</a:t>
             </a:r>
             <a:endParaRPr lang="en-US" sz="1300" dirty="0"/>
           </a:p>
@@ -14479,7 +14460,7 @@
                   <a:srgbClr val="FFFFFF"/>
                 </a:solidFill>
               </a:rPr>
-              <a:t>zcl_04_conv.clas.abap</a:t>
+              <a:t>zcl_02_conv.clas.abap</a:t>
             </a:r>
             <a:endParaRPr lang="en-US" sz="950" dirty="0"/>
           </a:p>
@@ -14515,7 +14496,7 @@
                   <a:srgbClr val="9DA5B4"/>
                 </a:solidFill>
               </a:rPr>
-              <a:t>ZS4D401_## › ZCL_04_CONV › main</a:t>
+              <a:t>ZS4D401_## › ZCL_02_CONV › main</a:t>
             </a:r>
             <a:endParaRPr lang="en-US" sz="850" dirty="0"/>
           </a:p>
@@ -18834,7 +18815,7 @@
                   <a:srgbClr val="89D1FF"/>
                 </a:solidFill>
               </a:rPr>
-              <a:t>AULA 04.02 · SEÇÃO 3</a:t>
+              <a:t>AULA 02.02 · SEÇÃO 3</a:t>
             </a:r>
             <a:endParaRPr lang="en-US" sz="1300" dirty="0"/>
           </a:p>
